--- a/deep_learning/TEMPLATE.pptx
+++ b/deep_learning/TEMPLATE.pptx
@@ -217,7 +217,7 @@
           <a:p>
             <a:fld id="{7BAEECA8-D063-486F-AE31-5020270C1449}" type="datetimeFigureOut">
               <a:rPr lang="en-US" smtClean="0"/>
-              <a:t>4/2/2026</a:t>
+              <a:t>4/21/2026</a:t>
             </a:fld>
             <a:endParaRPr lang="en-US"/>
           </a:p>
@@ -394,7 +394,7 @@
           <a:p>
             <a:fld id="{CB233BD1-3BA8-448D-9D08-7846095EA517}" type="datetimeFigureOut">
               <a:rPr lang="en-US" smtClean="0"/>
-              <a:t>4/2/2026</a:t>
+              <a:t>4/21/2026</a:t>
             </a:fld>
             <a:endParaRPr lang="en-US"/>
           </a:p>
@@ -808,7 +808,7 @@
           <a:p>
             <a:fld id="{6383FAE1-13DE-4511-8C1B-C8AFB720664C}" type="datetimeFigureOut">
               <a:rPr lang="en-US" smtClean="0"/>
-              <a:t>4/2/2026</a:t>
+              <a:t>4/21/2026</a:t>
             </a:fld>
             <a:endParaRPr lang="en-US"/>
           </a:p>
@@ -1006,7 +1006,7 @@
           <a:p>
             <a:fld id="{6383FAE1-13DE-4511-8C1B-C8AFB720664C}" type="datetimeFigureOut">
               <a:rPr lang="en-US" smtClean="0"/>
-              <a:t>4/2/2026</a:t>
+              <a:t>4/21/2026</a:t>
             </a:fld>
             <a:endParaRPr lang="en-US"/>
           </a:p>
@@ -1214,7 +1214,7 @@
           <a:p>
             <a:fld id="{6383FAE1-13DE-4511-8C1B-C8AFB720664C}" type="datetimeFigureOut">
               <a:rPr lang="en-US" smtClean="0"/>
-              <a:t>4/2/2026</a:t>
+              <a:t>4/21/2026</a:t>
             </a:fld>
             <a:endParaRPr lang="en-US"/>
           </a:p>
@@ -1412,7 +1412,7 @@
           <a:p>
             <a:fld id="{6383FAE1-13DE-4511-8C1B-C8AFB720664C}" type="datetimeFigureOut">
               <a:rPr lang="en-US" smtClean="0"/>
-              <a:t>4/2/2026</a:t>
+              <a:t>4/21/2026</a:t>
             </a:fld>
             <a:endParaRPr lang="en-US"/>
           </a:p>
@@ -1687,7 +1687,7 @@
           <a:p>
             <a:fld id="{6383FAE1-13DE-4511-8C1B-C8AFB720664C}" type="datetimeFigureOut">
               <a:rPr lang="en-US" smtClean="0"/>
-              <a:t>4/2/2026</a:t>
+              <a:t>4/21/2026</a:t>
             </a:fld>
             <a:endParaRPr lang="en-US"/>
           </a:p>
@@ -1952,7 +1952,7 @@
           <a:p>
             <a:fld id="{6383FAE1-13DE-4511-8C1B-C8AFB720664C}" type="datetimeFigureOut">
               <a:rPr lang="en-US" smtClean="0"/>
-              <a:t>4/2/2026</a:t>
+              <a:t>4/21/2026</a:t>
             </a:fld>
             <a:endParaRPr lang="en-US"/>
           </a:p>
@@ -2364,7 +2364,7 @@
           <a:p>
             <a:fld id="{6383FAE1-13DE-4511-8C1B-C8AFB720664C}" type="datetimeFigureOut">
               <a:rPr lang="en-US" smtClean="0"/>
-              <a:t>4/2/2026</a:t>
+              <a:t>4/21/2026</a:t>
             </a:fld>
             <a:endParaRPr lang="en-US"/>
           </a:p>
@@ -2505,7 +2505,7 @@
           <a:p>
             <a:fld id="{6383FAE1-13DE-4511-8C1B-C8AFB720664C}" type="datetimeFigureOut">
               <a:rPr lang="en-US" smtClean="0"/>
-              <a:t>4/2/2026</a:t>
+              <a:t>4/21/2026</a:t>
             </a:fld>
             <a:endParaRPr lang="en-US"/>
           </a:p>
@@ -2618,7 +2618,7 @@
           <a:p>
             <a:fld id="{6383FAE1-13DE-4511-8C1B-C8AFB720664C}" type="datetimeFigureOut">
               <a:rPr lang="en-US" smtClean="0"/>
-              <a:t>4/2/2026</a:t>
+              <a:t>4/21/2026</a:t>
             </a:fld>
             <a:endParaRPr lang="en-US"/>
           </a:p>
@@ -2929,7 +2929,7 @@
           <a:p>
             <a:fld id="{6383FAE1-13DE-4511-8C1B-C8AFB720664C}" type="datetimeFigureOut">
               <a:rPr lang="en-US" smtClean="0"/>
-              <a:t>4/2/2026</a:t>
+              <a:t>4/21/2026</a:t>
             </a:fld>
             <a:endParaRPr lang="en-US"/>
           </a:p>
@@ -3220,7 +3220,7 @@
           <a:p>
             <a:fld id="{6383FAE1-13DE-4511-8C1B-C8AFB720664C}" type="datetimeFigureOut">
               <a:rPr lang="en-US" smtClean="0"/>
-              <a:t>4/2/2026</a:t>
+              <a:t>4/21/2026</a:t>
             </a:fld>
             <a:endParaRPr lang="en-US"/>
           </a:p>
@@ -3464,7 +3464,7 @@
           <a:p>
             <a:fld id="{6383FAE1-13DE-4511-8C1B-C8AFB720664C}" type="datetimeFigureOut">
               <a:rPr lang="en-US" smtClean="0"/>
-              <a:t>4/2/2026</a:t>
+              <a:t>4/21/2026</a:t>
             </a:fld>
             <a:endParaRPr lang="en-US"/>
           </a:p>
@@ -4023,43 +4023,6 @@
           <a:chExt cx="0" cy="0"/>
         </a:xfrm>
       </p:grpSpPr>
-      <p:sp>
-        <p:nvSpPr>
-          <p:cNvPr id="2" name="Title 1">
-            <a:extLst>
-              <a:ext uri="{FF2B5EF4-FFF2-40B4-BE49-F238E27FC236}">
-                <a16:creationId xmlns:a16="http://schemas.microsoft.com/office/drawing/2014/main" id="{7EE215DA-3608-60AF-BA74-5CE165D36DFE}"/>
-              </a:ext>
-            </a:extLst>
-          </p:cNvPr>
-          <p:cNvSpPr>
-            <a:spLocks noGrp="1"/>
-          </p:cNvSpPr>
-          <p:nvPr>
-            <p:ph type="ctrTitle"/>
-          </p:nvPr>
-        </p:nvSpPr>
-        <p:spPr>
-          <a:xfrm>
-            <a:off x="255639" y="666589"/>
-            <a:ext cx="11700387" cy="4041648"/>
-          </a:xfrm>
-        </p:spPr>
-        <p:txBody>
-          <a:bodyPr>
-            <a:normAutofit/>
-          </a:bodyPr>
-          <a:lstStyle/>
-          <a:p>
-            <a:pPr algn="ctr"/>
-            <a:r>
-              <a:rPr lang="en-US" b="1" dirty="0"/>
-              <a:t>XXX</a:t>
-            </a:r>
-            <a:endParaRPr lang="en-US" dirty="0"/>
-          </a:p>
-        </p:txBody>
-      </p:sp>
     </p:spTree>
     <p:extLst>
       <p:ext uri="{BB962C8B-B14F-4D97-AF65-F5344CB8AC3E}">
@@ -4090,146 +4053,6 @@
           <a:chExt cx="0" cy="0"/>
         </a:xfrm>
       </p:grpSpPr>
-      <p:sp>
-        <p:nvSpPr>
-          <p:cNvPr id="5" name="TextBox 4">
-            <a:extLst>
-              <a:ext uri="{FF2B5EF4-FFF2-40B4-BE49-F238E27FC236}">
-                <a16:creationId xmlns:a16="http://schemas.microsoft.com/office/drawing/2014/main" id="{442B2F0B-CB87-B495-2FD4-E6ECE2CD486E}"/>
-              </a:ext>
-            </a:extLst>
-          </p:cNvPr>
-          <p:cNvSpPr txBox="1"/>
-          <p:nvPr/>
-        </p:nvSpPr>
-        <p:spPr>
-          <a:xfrm>
-            <a:off x="594845" y="306939"/>
-            <a:ext cx="8529489" cy="461665"/>
-          </a:xfrm>
-          <a:prstGeom prst="rect">
-            <a:avLst/>
-          </a:prstGeom>
-          <a:noFill/>
-        </p:spPr>
-        <p:txBody>
-          <a:bodyPr wrap="square">
-            <a:spAutoFit/>
-          </a:bodyPr>
-          <a:lstStyle/>
-          <a:p>
-            <a:r>
-              <a:rPr lang="en-US" sz="2400" dirty="0" err="1">
-                <a:solidFill>
-                  <a:schemeClr val="accent6">
-                    <a:lumMod val="60000"/>
-                    <a:lumOff val="40000"/>
-                  </a:schemeClr>
-                </a:solidFill>
-              </a:rPr>
-              <a:t>Fkds;fds</a:t>
-            </a:r>
-            <a:endParaRPr lang="en-US" sz="2400" dirty="0">
-              <a:solidFill>
-                <a:schemeClr val="accent6">
-                  <a:lumMod val="60000"/>
-                  <a:lumOff val="40000"/>
-                </a:schemeClr>
-              </a:solidFill>
-            </a:endParaRPr>
-          </a:p>
-        </p:txBody>
-      </p:sp>
-      <p:sp>
-        <p:nvSpPr>
-          <p:cNvPr id="7" name="TextBox 6">
-            <a:extLst>
-              <a:ext uri="{FF2B5EF4-FFF2-40B4-BE49-F238E27FC236}">
-                <a16:creationId xmlns:a16="http://schemas.microsoft.com/office/drawing/2014/main" id="{81508872-44FE-C987-D1E3-A093E1C9B1C1}"/>
-              </a:ext>
-            </a:extLst>
-          </p:cNvPr>
-          <p:cNvSpPr txBox="1"/>
-          <p:nvPr/>
-        </p:nvSpPr>
-        <p:spPr>
-          <a:xfrm>
-            <a:off x="383458" y="1371879"/>
-            <a:ext cx="10028903" cy="1200329"/>
-          </a:xfrm>
-          <a:prstGeom prst="rect">
-            <a:avLst/>
-          </a:prstGeom>
-          <a:noFill/>
-        </p:spPr>
-        <p:txBody>
-          <a:bodyPr wrap="square">
-            <a:spAutoFit/>
-          </a:bodyPr>
-          <a:lstStyle/>
-          <a:p>
-            <a:pPr marL="0" indent="0">
-              <a:buNone/>
-            </a:pPr>
-            <a:r>
-              <a:rPr lang="en-US" sz="2400" dirty="0" err="1">
-                <a:solidFill>
-                  <a:schemeClr val="accent6">
-                    <a:lumMod val="60000"/>
-                    <a:lumOff val="40000"/>
-                  </a:schemeClr>
-                </a:solidFill>
-              </a:rPr>
-              <a:t>Xxxx</a:t>
-            </a:r>
-            <a:endParaRPr lang="en-US" sz="2400" dirty="0">
-              <a:solidFill>
-                <a:schemeClr val="accent6">
-                  <a:lumMod val="60000"/>
-                  <a:lumOff val="40000"/>
-                </a:schemeClr>
-              </a:solidFill>
-            </a:endParaRPr>
-          </a:p>
-          <a:p>
-            <a:pPr marL="0" indent="0">
-              <a:buNone/>
-            </a:pPr>
-            <a:r>
-              <a:rPr lang="en-US" sz="2400" dirty="0" err="1">
-                <a:solidFill>
-                  <a:schemeClr val="accent6">
-                    <a:lumMod val="60000"/>
-                    <a:lumOff val="40000"/>
-                  </a:schemeClr>
-                </a:solidFill>
-              </a:rPr>
-              <a:t>Cccc</a:t>
-            </a:r>
-            <a:endParaRPr lang="en-US" sz="2400" dirty="0">
-              <a:solidFill>
-                <a:schemeClr val="accent6">
-                  <a:lumMod val="60000"/>
-                  <a:lumOff val="40000"/>
-                </a:schemeClr>
-              </a:solidFill>
-            </a:endParaRPr>
-          </a:p>
-          <a:p>
-            <a:pPr marL="0" indent="0">
-              <a:buNone/>
-            </a:pPr>
-            <a:endParaRPr lang="en-US" sz="2400" dirty="0">
-              <a:solidFill>
-                <a:schemeClr val="accent6">
-                  <a:lumMod val="60000"/>
-                  <a:lumOff val="40000"/>
-                </a:schemeClr>
-              </a:solidFill>
-            </a:endParaRPr>
-          </a:p>
-        </p:txBody>
-      </p:sp>
     </p:spTree>
     <p:extLst>
       <p:ext uri="{BB962C8B-B14F-4D97-AF65-F5344CB8AC3E}">
@@ -4266,118 +4089,6 @@
           <a:chExt cx="0" cy="0"/>
         </a:xfrm>
       </p:grpSpPr>
-      <p:sp>
-        <p:nvSpPr>
-          <p:cNvPr id="2" name="Title 1">
-            <a:extLst>
-              <a:ext uri="{FF2B5EF4-FFF2-40B4-BE49-F238E27FC236}">
-                <a16:creationId xmlns:a16="http://schemas.microsoft.com/office/drawing/2014/main" id="{795E1B75-886E-0812-B2FD-DD250C225521}"/>
-              </a:ext>
-            </a:extLst>
-          </p:cNvPr>
-          <p:cNvSpPr>
-            <a:spLocks noGrp="1"/>
-          </p:cNvSpPr>
-          <p:nvPr>
-            <p:ph type="title"/>
-          </p:nvPr>
-        </p:nvSpPr>
-        <p:spPr>
-          <a:xfrm>
-            <a:off x="274320" y="136525"/>
-            <a:ext cx="11466576" cy="832739"/>
-          </a:xfrm>
-        </p:spPr>
-        <p:txBody>
-          <a:bodyPr>
-            <a:normAutofit/>
-          </a:bodyPr>
-          <a:lstStyle/>
-          <a:p>
-            <a:r>
-              <a:rPr lang="en-US" sz="3600" dirty="0"/>
-              <a:t>EXTRA</a:t>
-            </a:r>
-          </a:p>
-        </p:txBody>
-      </p:sp>
-      <p:sp>
-        <p:nvSpPr>
-          <p:cNvPr id="4" name="TextBox 3">
-            <a:extLst>
-              <a:ext uri="{FF2B5EF4-FFF2-40B4-BE49-F238E27FC236}">
-                <a16:creationId xmlns:a16="http://schemas.microsoft.com/office/drawing/2014/main" id="{902F8BE4-9CEA-0DAD-0357-E0A8215F169D}"/>
-              </a:ext>
-            </a:extLst>
-          </p:cNvPr>
-          <p:cNvSpPr txBox="1"/>
-          <p:nvPr/>
-        </p:nvSpPr>
-        <p:spPr>
-          <a:xfrm>
-            <a:off x="274320" y="933117"/>
-            <a:ext cx="11658600" cy="646331"/>
-          </a:xfrm>
-          <a:prstGeom prst="rect">
-            <a:avLst/>
-          </a:prstGeom>
-          <a:noFill/>
-        </p:spPr>
-        <p:txBody>
-          <a:bodyPr wrap="square">
-            <a:spAutoFit/>
-          </a:bodyPr>
-          <a:lstStyle/>
-          <a:p>
-            <a:pPr marL="0" indent="0">
-              <a:buNone/>
-            </a:pPr>
-            <a:r>
-              <a:rPr lang="en-US" dirty="0" err="1">
-                <a:solidFill>
-                  <a:schemeClr val="accent6">
-                    <a:lumMod val="60000"/>
-                    <a:lumOff val="40000"/>
-                  </a:schemeClr>
-                </a:solidFill>
-              </a:rPr>
-              <a:t>Xxxxxxxxxxx</a:t>
-            </a:r>
-            <a:endParaRPr lang="en-US" dirty="0">
-              <a:solidFill>
-                <a:schemeClr val="accent6">
-                  <a:lumMod val="60000"/>
-                  <a:lumOff val="40000"/>
-                </a:schemeClr>
-              </a:solidFill>
-            </a:endParaRPr>
-          </a:p>
-          <a:p>
-            <a:pPr marL="0" indent="0">
-              <a:buNone/>
-            </a:pPr>
-            <a:r>
-              <a:rPr lang="en-US" dirty="0" err="1">
-                <a:solidFill>
-                  <a:schemeClr val="accent6">
-                    <a:lumMod val="60000"/>
-                    <a:lumOff val="40000"/>
-                  </a:schemeClr>
-                </a:solidFill>
-              </a:rPr>
-              <a:t>xxxxxxxxxxxx</a:t>
-            </a:r>
-            <a:endParaRPr lang="en-US" dirty="0">
-              <a:solidFill>
-                <a:schemeClr val="accent6">
-                  <a:lumMod val="60000"/>
-                  <a:lumOff val="40000"/>
-                </a:schemeClr>
-              </a:solidFill>
-            </a:endParaRPr>
-          </a:p>
-        </p:txBody>
-      </p:sp>
     </p:spTree>
     <p:extLst>
       <p:ext uri="{BB962C8B-B14F-4D97-AF65-F5344CB8AC3E}">
